--- a/assets/powerpoints/module-n1-inscription/E1-je-me-lance.pptx
+++ b/assets/powerpoints/module-n1-inscription/E1-je-me-lance.pptx
@@ -6014,7 +6014,97 @@
                 </a:solidFill>
                 <a:latin typeface="Verdana"/>
               </a:rPr>
-              <a:t>Dans l'activité : &lt;b&gt;à la table&lt;/b&gt; (on vous demande les cases du haut), &lt;b&gt;l'adresse&lt;/b&gt; (où vous habitez), &lt;b&gt;les chiffres&lt;/b&gt; (téléphone, code postal, courriel). Vous choisissez d'être &lt;b&gt;l'élève&lt;/b&gt; ou &lt;b&gt;la personne au comptoir&lt;/b&gt;.</a:t>
+              <a:t>Dans l'activité : </a:t>
+            </a:r>
+            <a:r>
+              <a:rPr sz="2000" b="1" i="0">
+                <a:solidFill>
+                  <a:srgbClr val="4B4F52"/>
+                </a:solidFill>
+                <a:latin typeface="Verdana"/>
+              </a:rPr>
+              <a:t>à la table</a:t>
+            </a:r>
+            <a:r>
+              <a:rPr sz="2000" b="0" i="0">
+                <a:solidFill>
+                  <a:srgbClr val="4B4F52"/>
+                </a:solidFill>
+                <a:latin typeface="Verdana"/>
+              </a:rPr>
+              <a:t> (on vous demande les cases du haut), </a:t>
+            </a:r>
+            <a:r>
+              <a:rPr sz="2000" b="1" i="0">
+                <a:solidFill>
+                  <a:srgbClr val="4B4F52"/>
+                </a:solidFill>
+                <a:latin typeface="Verdana"/>
+              </a:rPr>
+              <a:t>l'adresse</a:t>
+            </a:r>
+            <a:r>
+              <a:rPr sz="2000" b="0" i="0">
+                <a:solidFill>
+                  <a:srgbClr val="4B4F52"/>
+                </a:solidFill>
+                <a:latin typeface="Verdana"/>
+              </a:rPr>
+              <a:t> (où vous habitez), </a:t>
+            </a:r>
+            <a:r>
+              <a:rPr sz="2000" b="1" i="0">
+                <a:solidFill>
+                  <a:srgbClr val="4B4F52"/>
+                </a:solidFill>
+                <a:latin typeface="Verdana"/>
+              </a:rPr>
+              <a:t>les chiffres</a:t>
+            </a:r>
+            <a:r>
+              <a:rPr sz="2000" b="0" i="0">
+                <a:solidFill>
+                  <a:srgbClr val="4B4F52"/>
+                </a:solidFill>
+                <a:latin typeface="Verdana"/>
+              </a:rPr>
+              <a:t> (téléphone, code postal, courriel). Vous choisissez d'être </a:t>
+            </a:r>
+            <a:r>
+              <a:rPr sz="2000" b="1" i="0">
+                <a:solidFill>
+                  <a:srgbClr val="4B4F52"/>
+                </a:solidFill>
+                <a:latin typeface="Verdana"/>
+              </a:rPr>
+              <a:t>l'élève</a:t>
+            </a:r>
+            <a:r>
+              <a:rPr sz="2000" b="0" i="0">
+                <a:solidFill>
+                  <a:srgbClr val="4B4F52"/>
+                </a:solidFill>
+                <a:latin typeface="Verdana"/>
+              </a:rPr>
+              <a:t> ou </a:t>
+            </a:r>
+            <a:r>
+              <a:rPr sz="2000" b="1" i="0">
+                <a:solidFill>
+                  <a:srgbClr val="4B4F52"/>
+                </a:solidFill>
+                <a:latin typeface="Verdana"/>
+              </a:rPr>
+              <a:t>la personne au comptoir</a:t>
+            </a:r>
+            <a:r>
+              <a:rPr sz="2000" b="0" i="0">
+                <a:solidFill>
+                  <a:srgbClr val="4B4F52"/>
+                </a:solidFill>
+                <a:latin typeface="Verdana"/>
+              </a:rPr>
+              <a:t>.</a:t>
             </a:r>
           </a:p>
         </p:txBody>
@@ -8585,7 +8675,25 @@
                 </a:solidFill>
                 <a:latin typeface="Verdana"/>
               </a:rPr>
-              <a:t>Vous ne vous appelez pas Yusuf et vous n'habitez pas avenue Papineau. Ce sont les &lt;b&gt;cases&lt;/b&gt; et leur ordre qui se réemploient, jamais le contenu. Une fiche est utile seulement si elle est vraie.</a:t>
+              <a:t>Vous ne vous appelez pas Yusuf et vous n'habitez pas avenue Papineau. Ce sont les </a:t>
+            </a:r>
+            <a:r>
+              <a:rPr sz="2000" b="1" i="0">
+                <a:solidFill>
+                  <a:srgbClr val="4B4F52"/>
+                </a:solidFill>
+                <a:latin typeface="Verdana"/>
+              </a:rPr>
+              <a:t>cases</a:t>
+            </a:r>
+            <a:r>
+              <a:rPr sz="2000" b="0" i="0">
+                <a:solidFill>
+                  <a:srgbClr val="4B4F52"/>
+                </a:solidFill>
+                <a:latin typeface="Verdana"/>
+              </a:rPr>
+              <a:t> et leur ordre qui se réemploient, jamais le contenu. Une fiche est utile seulement si elle est vraie.</a:t>
             </a:r>
           </a:p>
         </p:txBody>
